--- a/livrables/V2-ameliorations/Soutenance_E21_V2.pptx
+++ b/livrables/V2-ameliorations/Soutenance_E21_V2.pptx
@@ -2803,7 +2803,7 @@
         </p:nvSpPr>
         <p:spPr>
           <a:xfrm>
-            <a:off x="548640" y="4251960"/>
+            <a:off x="548640" y="4553712"/>
             <a:ext cx="4572000" cy="274320"/>
           </a:xfrm>
           <a:prstGeom prst="rect">
@@ -3631,6 +3631,40 @@
               <a:t>Synthèse</a:t>
             </a:r>
             <a:endParaRPr lang="en-US" sz="1200" dirty="0"/>
+          </a:p>
+        </p:txBody>
+      </p:sp>
+      <p:sp>
+        <p:nvSpPr>
+          <p:cNvPr id="29" name="TextBox 28"/>
+          <p:cNvSpPr txBox="1"/>
+          <p:nvPr/>
+        </p:nvSpPr>
+        <p:spPr>
+          <a:xfrm>
+            <a:off x="548640" y="4242816"/>
+            <a:ext cx="5120640" cy="274320"/>
+          </a:xfrm>
+          <a:prstGeom prst="rect">
+            <a:avLst/>
+          </a:prstGeom>
+          <a:noFill/>
+        </p:spPr>
+        <p:txBody>
+          <a:bodyPr wrap="square" lIns="0" rIns="0" tIns="0" bIns="0" anchor="t">
+            <a:spAutoFit/>
+          </a:bodyPr>
+          <a:lstStyle/>
+          <a:p>
+            <a:r>
+              <a:rPr sz="1000" b="0">
+                <a:solidFill>
+                  <a:srgbClr val="CBD5E1"/>
+                </a:solidFill>
+                <a:latin typeface="Segoe UI"/>
+              </a:rPr>
+              <a:t>V1 réalisée en groupe avec Lucas HUARD, Jérémy LESSA et David AMARO MONTEIRO</a:t>
+            </a:r>
           </a:p>
         </p:txBody>
       </p:sp>
